--- a/Ardia_Health_Pitch_Deck_2026_v2.pptx
+++ b/Ardia_Health_Pitch_Deck_2026_v2.pptx
@@ -6577,7 +6577,7 @@
                 <a:ea typeface="Calibri" pitchFamily="34" charset="-122"/>
                 <a:cs typeface="Calibri" pitchFamily="34" charset="-120"/>
               </a:rPr>
-              <a:t>(469) 679-3334  |  ardiahealthlabs.com  |  Argyle, TX 76226 (DFW Metro)</a:t>
+              <a:t>(469) 679-3334 (Ram)  ·  (469) 499-6435 (Manasa)  |  ardiahealthlabs.com  |  Argyle, TX 76226</a:t>
             </a:r>
             <a:endParaRPr lang="en-US" sz="1050" dirty="0"/>
           </a:p>
@@ -13881,7 +13881,7 @@
                 <a:ea typeface="Calibri" pitchFamily="34" charset="-122"/>
                 <a:cs typeface="Calibri" pitchFamily="34" charset="-120"/>
               </a:rPr>
-              <a:t>▸  Contact: founders@ardiahealthlabs.com</a:t>
+              <a:t>▸  founders@ardiahealthlabs.com  |  (469) 499-6435</a:t>
             </a:r>
             <a:endParaRPr lang="en-US" sz="950" dirty="0"/>
           </a:p>
